--- a/mirai_ledger_bemutato.pptx
+++ b/mirai_ledger_bemutato.pptx
@@ -11756,36 +11756,6 @@
       </p:cxnSp>
       <p:pic>
         <p:nvPicPr>
-          <p:cNvPr id="32" name="Picture 31" descr="React Logo - PNG Logo Vector Brand Downloads (SVG, EPS)">
-            <a:extLst>
-              <a:ext uri="{FF2B5EF4-FFF2-40B4-BE49-F238E27FC236}">
-                <a16:creationId xmlns:a16="http://schemas.microsoft.com/office/drawing/2014/main" id="{A50055F3-60E5-CEC0-C6CA-3AC40F81DA19}"/>
-              </a:ext>
-            </a:extLst>
-          </p:cNvPr>
-          <p:cNvPicPr>
-            <a:picLocks noChangeAspect="1"/>
-          </p:cNvPicPr>
-          <p:nvPr/>
-        </p:nvPicPr>
-        <p:blipFill>
-          <a:blip r:embed="rId2"/>
-          <a:stretch>
-            <a:fillRect/>
-          </a:stretch>
-        </p:blipFill>
-        <p:spPr>
-          <a:xfrm>
-            <a:off x="4867577" y="3007754"/>
-            <a:ext cx="1583241" cy="890573"/>
-          </a:xfrm>
-          <a:prstGeom prst="rect">
-            <a:avLst/>
-          </a:prstGeom>
-        </p:spPr>
-      </p:pic>
-      <p:pic>
-        <p:nvPicPr>
           <p:cNvPr id="33" name="Graphic 32" descr="Rust Icon &amp; Logo | Dashboard Icons &amp; Logos">
             <a:extLst>
               <a:ext uri="{FF2B5EF4-FFF2-40B4-BE49-F238E27FC236}">
@@ -11802,7 +11772,7 @@
           <a:blip>
             <a:extLst>
               <a:ext uri="{96DAC541-7B7A-43D3-8B79-37D633B846F1}">
-                <asvg:svgBlip xmlns:asvg="http://schemas.microsoft.com/office/drawing/2016/SVG/main" r:embed="rId3"/>
+                <asvg:svgBlip xmlns:asvg="http://schemas.microsoft.com/office/drawing/2016/SVG/main" r:embed="rId2"/>
               </a:ext>
             </a:extLst>
           </a:blip>
@@ -11957,6 +11927,36 @@
           <p:nvPr/>
         </p:nvPicPr>
         <p:blipFill>
+          <a:blip r:embed="rId3"/>
+          <a:stretch>
+            <a:fillRect/>
+          </a:stretch>
+        </p:blipFill>
+        <p:spPr>
+          <a:xfrm>
+            <a:off x="1551945" y="4989445"/>
+            <a:ext cx="1927020" cy="1284680"/>
+          </a:xfrm>
+          <a:prstGeom prst="rect">
+            <a:avLst/>
+          </a:prstGeom>
+        </p:spPr>
+      </p:pic>
+      <p:pic>
+        <p:nvPicPr>
+          <p:cNvPr id="40" name="Picture 39" descr="File:Jira Logo.svg - Wikimedia Commons">
+            <a:extLst>
+              <a:ext uri="{FF2B5EF4-FFF2-40B4-BE49-F238E27FC236}">
+                <a16:creationId xmlns:a16="http://schemas.microsoft.com/office/drawing/2014/main" id="{827581A8-4D8C-BB60-B7BA-79BB2BD44A14}"/>
+              </a:ext>
+            </a:extLst>
+          </p:cNvPr>
+          <p:cNvPicPr>
+            <a:picLocks noChangeAspect="1"/>
+          </p:cNvPicPr>
+          <p:nvPr/>
+        </p:nvPicPr>
+        <p:blipFill>
           <a:blip r:embed="rId4"/>
           <a:stretch>
             <a:fillRect/>
@@ -11964,8 +11964,8 @@
         </p:blipFill>
         <p:spPr>
           <a:xfrm>
-            <a:off x="1551945" y="4989445"/>
-            <a:ext cx="1927020" cy="1284680"/>
+            <a:off x="9235440" y="3113251"/>
+            <a:ext cx="965595" cy="406355"/>
           </a:xfrm>
           <a:prstGeom prst="rect">
             <a:avLst/>
@@ -11974,10 +11974,10 @@
       </p:pic>
       <p:pic>
         <p:nvPicPr>
-          <p:cNvPr id="40" name="Picture 39" descr="File:Jira Logo.svg - Wikimedia Commons">
-            <a:extLst>
-              <a:ext uri="{FF2B5EF4-FFF2-40B4-BE49-F238E27FC236}">
-                <a16:creationId xmlns:a16="http://schemas.microsoft.com/office/drawing/2014/main" id="{827581A8-4D8C-BB60-B7BA-79BB2BD44A14}"/>
+          <p:cNvPr id="41" name="Picture 40" descr="Figma Logo with Colorful Circles PNG">
+            <a:extLst>
+              <a:ext uri="{FF2B5EF4-FFF2-40B4-BE49-F238E27FC236}">
+                <a16:creationId xmlns:a16="http://schemas.microsoft.com/office/drawing/2014/main" id="{3B9250CD-ACD3-A1BA-C589-10975B016B56}"/>
               </a:ext>
             </a:extLst>
           </p:cNvPr>
@@ -11994,8 +11994,8 @@
         </p:blipFill>
         <p:spPr>
           <a:xfrm>
-            <a:off x="9235440" y="3113251"/>
-            <a:ext cx="965595" cy="406355"/>
+            <a:off x="7895666" y="3029847"/>
+            <a:ext cx="1199088" cy="573164"/>
           </a:xfrm>
           <a:prstGeom prst="rect">
             <a:avLst/>
@@ -12004,10 +12004,10 @@
       </p:pic>
       <p:pic>
         <p:nvPicPr>
-          <p:cNvPr id="41" name="Picture 40" descr="Figma Logo with Colorful Circles PNG">
-            <a:extLst>
-              <a:ext uri="{FF2B5EF4-FFF2-40B4-BE49-F238E27FC236}">
-                <a16:creationId xmlns:a16="http://schemas.microsoft.com/office/drawing/2014/main" id="{3B9250CD-ACD3-A1BA-C589-10975B016B56}"/>
+          <p:cNvPr id="45" name="Picture 44" descr="File:CSS3 logo and wordmark.svg - Wikimedia Commons">
+            <a:extLst>
+              <a:ext uri="{FF2B5EF4-FFF2-40B4-BE49-F238E27FC236}">
+                <a16:creationId xmlns:a16="http://schemas.microsoft.com/office/drawing/2014/main" id="{43C56772-3902-8219-5EAD-2595C7F4A42D}"/>
               </a:ext>
             </a:extLst>
           </p:cNvPr>
@@ -12018,36 +12018,6 @@
         </p:nvPicPr>
         <p:blipFill>
           <a:blip r:embed="rId6"/>
-          <a:stretch>
-            <a:fillRect/>
-          </a:stretch>
-        </p:blipFill>
-        <p:spPr>
-          <a:xfrm>
-            <a:off x="7895666" y="3029847"/>
-            <a:ext cx="1199088" cy="573164"/>
-          </a:xfrm>
-          <a:prstGeom prst="rect">
-            <a:avLst/>
-          </a:prstGeom>
-        </p:spPr>
-      </p:pic>
-      <p:pic>
-        <p:nvPicPr>
-          <p:cNvPr id="45" name="Picture 44" descr="File:CSS3 logo and wordmark.svg - Wikimedia Commons">
-            <a:extLst>
-              <a:ext uri="{FF2B5EF4-FFF2-40B4-BE49-F238E27FC236}">
-                <a16:creationId xmlns:a16="http://schemas.microsoft.com/office/drawing/2014/main" id="{43C56772-3902-8219-5EAD-2595C7F4A42D}"/>
-              </a:ext>
-            </a:extLst>
-          </p:cNvPr>
-          <p:cNvPicPr>
-            <a:picLocks noChangeAspect="1"/>
-          </p:cNvPicPr>
-          <p:nvPr/>
-        </p:nvPicPr>
-        <p:blipFill>
-          <a:blip r:embed="rId7"/>
           <a:stretch>
             <a:fillRect/>
           </a:stretch>
@@ -12184,6 +12154,36 @@
           </a:fontRef>
         </p:style>
       </p:cxnSp>
+      <p:pic>
+        <p:nvPicPr>
+          <p:cNvPr id="49" name="Picture 48" descr="Media Assets | SolidJS">
+            <a:extLst>
+              <a:ext uri="{FF2B5EF4-FFF2-40B4-BE49-F238E27FC236}">
+                <a16:creationId xmlns:a16="http://schemas.microsoft.com/office/drawing/2014/main" id="{40525605-ED20-269C-B07E-D1AF71B72375}"/>
+              </a:ext>
+            </a:extLst>
+          </p:cNvPr>
+          <p:cNvPicPr>
+            <a:picLocks noChangeAspect="1"/>
+          </p:cNvPicPr>
+          <p:nvPr/>
+        </p:nvPicPr>
+        <p:blipFill>
+          <a:blip r:embed="rId7"/>
+          <a:stretch>
+            <a:fillRect/>
+          </a:stretch>
+        </p:blipFill>
+        <p:spPr>
+          <a:xfrm>
+            <a:off x="3991362" y="2981738"/>
+            <a:ext cx="2915451" cy="534245"/>
+          </a:xfrm>
+          <a:prstGeom prst="rect">
+            <a:avLst/>
+          </a:prstGeom>
+        </p:spPr>
+      </p:pic>
     </p:spTree>
     <p:extLst>
       <p:ext uri="{BB962C8B-B14F-4D97-AF65-F5344CB8AC3E}">
